--- a/report/data_cluster/whoisteacher_slide.pptx
+++ b/report/data_cluster/whoisteacher_slide.pptx
@@ -3390,7 +3390,7 @@
                 </a:solidFill>
                 <a:latin typeface="Garamond"/>
               </a:rPr>
-              <a:t>Our results are robust to this boundary: dropping special education teachers (d) and the residual category (e) moves the pooled leaving rate by 0.1 points (8.7 to 8.6).</a:t>
+              <a:t>Our results are robust to this boundary: dropping special education teachers (d) and the residual category (e) moves the pooled leaving rate by 0.1 points (8.6 to 8.7).</a:t>
             </a:r>
           </a:p>
         </p:txBody>

--- a/report/data_cluster/whoisteacher_slide.pptx
+++ b/report/data_cluster/whoisteacher_slide.pptx
@@ -3390,7 +3390,7 @@
                 </a:solidFill>
                 <a:latin typeface="Garamond"/>
               </a:rPr>
-              <a:t>Our results are robust to this boundary: dropping special education teachers (d) and the residual category (e) moves the pooled leaving rate by 0.1 points (8.6 to 8.7).</a:t>
+              <a:t>Our results are robust to this boundary: dropping special education teachers (d) and the residual category (e) moves the 1997–2024 average leaving rate from 8.6 to 8.7.</a:t>
             </a:r>
           </a:p>
         </p:txBody>
